--- a/Deliverables/Training_Skills_Developers.pptx
+++ b/Deliverables/Training_Skills_Developers.pptx
@@ -5,7 +5,7 @@
     <p:sldMasterId id="2147483655" r:id="rId1"/>
   </p:sldMasterIdLst>
   <p:notesMasterIdLst>
-    <p:notesMasterId r:id="rId44"/>
+    <p:notesMasterId r:id="rId45"/>
   </p:notesMasterIdLst>
   <p:sldIdLst>
     <p:sldId id="256" r:id="rId2"/>
@@ -45,11 +45,12 @@
     <p:sldId id="301" r:id="rId36"/>
     <p:sldId id="305" r:id="rId37"/>
     <p:sldId id="289" r:id="rId38"/>
-    <p:sldId id="302" r:id="rId39"/>
-    <p:sldId id="275" r:id="rId40"/>
-    <p:sldId id="268" r:id="rId41"/>
-    <p:sldId id="269" r:id="rId42"/>
-    <p:sldId id="270" r:id="rId43"/>
+    <p:sldId id="306" r:id="rId39"/>
+    <p:sldId id="302" r:id="rId40"/>
+    <p:sldId id="275" r:id="rId41"/>
+    <p:sldId id="268" r:id="rId42"/>
+    <p:sldId id="269" r:id="rId43"/>
+    <p:sldId id="270" r:id="rId44"/>
   </p:sldIdLst>
   <p:sldSz cx="9144000" cy="5143500" type="screen16x9"/>
   <p:notesSz cx="5143500" cy="9144000"/>
@@ -3608,13 +3609,15 @@
           <a:p>
             <a:r>
               <a:rPr lang="en-US" dirty="0"/>
-              <a:t>[Distribution and API]
+              <a:t>Mini-exercise: Test your troubleshooting skills
 Say:
-There are several ways to get skills to users. For individual use, it's as simple as downloading the folder and uploading it through Claude settings, or placing it directly in your Claude Code skills directory. For teams, admins can deploy skills workspace-wide with automatic updates. For programmatic use, the API gives you the /v1/skills endpoint and the container.skills parameter in the Messages API — this is how you build applications that leverage skills at scale. And importantly, Anthropic has published skills as an open standard called Agent Skills. The goal is portability — the same skill should work across platforms, just like MCP servers do. Use the compatibility field in your frontmatter to note any platform-specific requirements.
+Let’s put the troubleshooting techniques into practice using the code review skill you’ve been building throughout the session. First, run the agent-skills CLI validator against your skill and resolve any warnings it flags — this could be a vague description, missing frontmatter fields, or structural issues. Next, walk through the full discover, load, behave debugging flow yourself: verify Claude discovers your skill, confirm the content loads correctly, and test that it behaves as expected on a real file. Once your skill passes all three stages, intentionally break one thing — maybe corrupt the description, add a typo to allowed-tools, or move the file to the wrong directory. Then swap with a partner and try to diagnose each other’s bug using the debugging flow, without hints.
 Do:
-- Show the Claude Settings &gt; Capabilities &gt; Skills upload flow if possible
-- Mention the public skills repository at github.com/anthropics/skills for reference
-- Transition: "Let's wrap up with a discussion and key takeaways."</a:t>
+- Set timer for 10 minutes (approximately 12 minutes total with debrief)
+- Remind participants to use the skill they built in the earlier exercises — it should already have frontmatter, allowed-tools, and a description
+- Circulate and observe — note which debugging steps participants skip or struggle with
+- Quick debrief: "Which stage of the debugging flow was most useful? Did the validator catch things you missed?"
+- Transition: "Now that you can build, secure, and debug skills, let’s look at how to distribute them."</a:t>
             </a:r>
           </a:p>
         </p:txBody>
@@ -3634,7 +3637,7 @@
           <a:bodyPr/>
           <a:lstStyle/>
           <a:p>
-            <a:fld id="{F7021451-1387-4CA6-816F-3879F97B5CBC}" type="slidenum">
+            <a:fld id="{A1B2C3D4-E5F6-7890-ABCD-EF1234567890}" type="slidenum">
               <a:rPr lang="en-US"/>
               <a:t>38</a:t>
             </a:fld>
@@ -3643,11 +3646,6 @@
         </p:txBody>
       </p:sp>
     </p:spTree>
-    <p:extLst>
-      <p:ext uri="{BB962C8B-B14F-4D97-AF65-F5344CB8AC3E}">
-        <p14:creationId xmlns:p14="http://schemas.microsoft.com/office/powerpoint/2010/main" val="1024086991"/>
-      </p:ext>
-    </p:extLst>
   </p:cSld>
   <p:clrMapOvr>
     <a:masterClrMapping/>
@@ -3674,7 +3672,19 @@
       </p:grpSpPr>
       <p:sp>
         <p:nvSpPr>
-          <p:cNvPr id="2" name="Notes Placeholder"/>
+          <p:cNvPr id="2" name="Slide Image Placeholder 1"/>
+          <p:cNvSpPr>
+            <a:spLocks noGrp="1" noRot="1" noChangeAspect="1"/>
+          </p:cNvSpPr>
+          <p:nvPr>
+            <p:ph type="sldImg"/>
+          </p:nvPr>
+        </p:nvSpPr>
+        <p:spPr/>
+      </p:sp>
+      <p:sp>
+        <p:nvSpPr>
+          <p:cNvPr id="3" name="Notes Placeholder 2"/>
           <p:cNvSpPr>
             <a:spLocks noGrp="1"/>
           </p:cNvSpPr>
@@ -3689,32 +3699,46 @@
           <a:p>
             <a:r>
               <a:rPr lang="en-US" dirty="0"/>
-              <a:t>Reflection
+              <a:t>[Distribution and API]
 Say:
-Before we summarize, take a moment to reflect on these four questions. What concept was newest to you? How might you apply skills in your current project this week? What question do you still have? And what would you teach a colleague about skills? These reflections help consolidate your learning and identify areas for follow-up.
+There are several ways to get skills to users. For individual use, it's as simple as downloading the folder and uploading it through Claude settings, or placing it directly in your Claude Code skills directory. For teams, admins can deploy skills workspace-wide with automatic updates. For programmatic use, the API gives you the /v1/skills endpoint and the container.skills parameter in the Messages API — this is how you build applications that leverage skills at scale. And importantly, Anthropic has published skills as an open standard called Agent Skills. The goal is portability — the same skill should work across platforms, just like MCP servers do. Use the compatibility field in your frontmatter to note any platform-specific requirements.
 Do:
-- Give 2 minutes for individual reflection (approximately 3 minutes)
-- Optionally ask 2-3 volunteers to share one reflection
-- Note any common remaining questions for the resources slide
-- Transition</a:t>
-            </a:r>
-            <a:r>
+- Show the Claude Settings &gt; Capabilities &gt; Skills upload flow if possible
+- Mention the public skills repository at github.com/anthropics/skills for reference
+- Transition: "Let's wrap up with a discussion and key takeaways."</a:t>
+            </a:r>
+          </a:p>
+        </p:txBody>
+      </p:sp>
+      <p:sp>
+        <p:nvSpPr>
+          <p:cNvPr id="4" name="Slide Number Placeholder 3"/>
+          <p:cNvSpPr>
+            <a:spLocks noGrp="1"/>
+          </p:cNvSpPr>
+          <p:nvPr>
+            <p:ph type="sldNum" sz="quarter" idx="10"/>
+          </p:nvPr>
+        </p:nvSpPr>
+        <p:spPr/>
+        <p:txBody>
+          <a:bodyPr/>
+          <a:lstStyle/>
+          <a:p>
+            <a:fld id="{F7021451-1387-4CA6-816F-3879F97B5CBC}" type="slidenum">
               <a:rPr lang="en-US"/>
-              <a:t>: "Let's </a:t>
-            </a:r>
-            <a:r>
-              <a:rPr lang="en-US" dirty="0"/>
-              <a:t>review the key takeaways from </a:t>
-            </a:r>
-            <a:r>
-              <a:rPr lang="en-US"/>
-              <a:t>today."</a:t>
-            </a:r>
-            <a:endParaRPr lang="en-US" dirty="0"/>
+              <a:t>39</a:t>
+            </a:fld>
+            <a:endParaRPr lang="en-US"/>
           </a:p>
         </p:txBody>
       </p:sp>
     </p:spTree>
+    <p:extLst>
+      <p:ext uri="{BB962C8B-B14F-4D97-AF65-F5344CB8AC3E}">
+        <p14:creationId xmlns:p14="http://schemas.microsoft.com/office/powerpoint/2010/main" val="1024086991"/>
+      </p:ext>
+    </p:extLst>
   </p:cSld>
   <p:clrMapOvr>
     <a:masterClrMapping/>
@@ -3834,19 +3858,7 @@
       </p:grpSpPr>
       <p:sp>
         <p:nvSpPr>
-          <p:cNvPr id="2" name="Slide Image Placeholder 1"/>
-          <p:cNvSpPr>
-            <a:spLocks noGrp="1" noRot="1" noChangeAspect="1"/>
-          </p:cNvSpPr>
-          <p:nvPr>
-            <p:ph type="sldImg"/>
-          </p:nvPr>
-        </p:nvSpPr>
-        <p:spPr/>
-      </p:sp>
-      <p:sp>
-        <p:nvSpPr>
-          <p:cNvPr id="3" name="Notes Placeholder 2"/>
+          <p:cNvPr id="2" name="Notes Placeholder"/>
           <p:cNvSpPr>
             <a:spLocks noGrp="1"/>
           </p:cNvSpPr>
@@ -3861,91 +3873,32 @@
           <a:p>
             <a:r>
               <a:rPr lang="en-US" dirty="0"/>
-              <a:t>Key takeaways
+              <a:t>Reflection
 Say:
-Here are the essential points </a:t>
+Before we summarize, take a moment to reflect on these four questions. What concept was newest to you? How might you apply skills in your current project this week? What question do you still have? And what would you teach a colleague about skills? These reflections help consolidate your learning and identify areas for follow-up.
+Do:
+- Give 2 minutes for individual reflection (approximately 3 minutes)
+- Optionally ask 2-3 volunteers to share one reflection
+- Note any common remaining questions for the resources slide
+- Transition</a:t>
             </a:r>
             <a:r>
               <a:rPr lang="en-US"/>
-              <a:t>from today's </a:t>
+              <a:t>: "Let's </a:t>
             </a:r>
             <a:r>
               <a:rPr lang="en-US" dirty="0"/>
-              <a:t>session. Skills are on-demand, reusable instruction sets stored as SKILL.md files. They follow a three-scope resolution chain: project, user, and installed. The frontmatter description is your most important metadata — it determines when Claude activates your skill. Skills inherit </a:t>
+              <a:t>review the key takeaways from </a:t>
             </a:r>
             <a:r>
               <a:rPr lang="en-US"/>
-              <a:t>the session's </a:t>
-            </a:r>
-            <a:r>
-              <a:rPr lang="en-US" dirty="0"/>
-              <a:t>security model with no privilege escalation. Enterprise teams can manage skills centrally with policies and approved sources. And when troubleshooting, follow the discover, load, behave debugging flow.
-Do:
-- Read through each takeaway, adding brief commentary (approximately 2 minutes)
-- Ask</a:t>
-            </a:r>
-            <a:r>
-              <a:rPr lang="en-US"/>
-              <a:t>: "Which </a:t>
-            </a:r>
-            <a:r>
-              <a:rPr lang="en-US" dirty="0"/>
-              <a:t>takeaway is most relevant to your </a:t>
-            </a:r>
-            <a:r>
-              <a:rPr lang="en-US"/>
-              <a:t>immediate work"</a:t>
-            </a:r>
-            <a:r>
-              <a:rPr lang="en-US" dirty="0"/>
-              <a:t>
-- Transition</a:t>
-            </a:r>
-            <a:r>
-              <a:rPr lang="en-US"/>
-              <a:t>: "Let </a:t>
-            </a:r>
-            <a:r>
-              <a:rPr lang="en-US" dirty="0"/>
-              <a:t>me share some resources for continuing your </a:t>
-            </a:r>
-            <a:r>
-              <a:rPr lang="en-US"/>
-              <a:t>learning."</a:t>
+              <a:t>today."</a:t>
             </a:r>
             <a:endParaRPr lang="en-US" dirty="0"/>
           </a:p>
         </p:txBody>
       </p:sp>
-      <p:sp>
-        <p:nvSpPr>
-          <p:cNvPr id="4" name="Slide Number Placeholder 3"/>
-          <p:cNvSpPr>
-            <a:spLocks noGrp="1"/>
-          </p:cNvSpPr>
-          <p:nvPr>
-            <p:ph type="sldNum" sz="quarter" idx="10"/>
-          </p:nvPr>
-        </p:nvSpPr>
-        <p:spPr/>
-        <p:txBody>
-          <a:bodyPr/>
-          <a:lstStyle/>
-          <a:p>
-            <a:fld id="{F7021451-1387-4CA6-816F-3879F97B5CBC}" type="slidenum">
-              <a:rPr lang="en-US"/>
-              <a:t>40</a:t>
-            </a:fld>
-            <a:endParaRPr lang="en-US"/>
-          </a:p>
-        </p:txBody>
-      </p:sp>
     </p:spTree>
-    <p:extLst>
-      <p:ext uri="{BB962C8B-B14F-4D97-AF65-F5344CB8AC3E}">
-        <p14:creationId xmlns:p14="http://schemas.microsoft.com/office/powerpoint/2010/main" val="1024086991"/>
-      </p:ext>
-    </p:extLst>
   </p:cSld>
   <p:clrMapOvr>
     <a:masterClrMapping/>
@@ -3999,26 +3952,57 @@
           <a:p>
             <a:r>
               <a:rPr lang="en-US" dirty="0"/>
-              <a:t>Resources and next steps
+              <a:t>Key takeaways
 Say:
-Here are your key resources for continuing with skills. The Claude Code documentation at docs.anthropic.com has the complete skills reference. The skills section of the Claude Code docs covers advanced topics like plugin integration and custom tool access. For hands-on practice, try converting one of your existing CLAUDE.md instruction sets into a modular skill this week. And if you build something useful, consider sharing it with the team or the broader community.
+Here are the essential points </a:t>
+            </a:r>
+            <a:r>
+              <a:rPr lang="en-US"/>
+              <a:t>from today's </a:t>
+            </a:r>
+            <a:r>
+              <a:rPr lang="en-US" dirty="0"/>
+              <a:t>session. Skills are on-demand, reusable instruction sets stored as SKILL.md files. They follow a three-scope resolution chain: project, user, and installed. The frontmatter description is your most important metadata — it determines when Claude activates your skill. Skills inherit </a:t>
+            </a:r>
+            <a:r>
+              <a:rPr lang="en-US"/>
+              <a:t>the session's </a:t>
+            </a:r>
+            <a:r>
+              <a:rPr lang="en-US" dirty="0"/>
+              <a:t>security model with no privilege escalation. Enterprise teams can manage skills centrally with policies and approved sources. And when troubleshooting, follow the discover, load, behave debugging flow.
 Do:
-- Share links in chat or on screen (approximately 2 minutes)
-- Recommend starting with one specific skill conversion as homework
-- Mention the community channels for sharing and getting help
+- Read through each takeaway, adding brief commentary (approximately 2 minutes)
+- Ask</a:t>
+            </a:r>
+            <a:r>
+              <a:rPr lang="en-US"/>
+              <a:t>: "Which </a:t>
+            </a:r>
+            <a:r>
+              <a:rPr lang="en-US" dirty="0"/>
+              <a:t>takeaway is most relevant to your </a:t>
+            </a:r>
+            <a:r>
+              <a:rPr lang="en-US"/>
+              <a:t>immediate work"</a:t>
+            </a:r>
+            <a:r>
+              <a:rPr lang="en-US" dirty="0"/>
+              <a:t>
 - Transition</a:t>
             </a:r>
             <a:r>
               <a:rPr lang="en-US"/>
-              <a:t>: "Let's </a:t>
+              <a:t>: "Let </a:t>
             </a:r>
             <a:r>
               <a:rPr lang="en-US" dirty="0"/>
-              <a:t>wrap </a:t>
+              <a:t>me share some resources for continuing your </a:t>
             </a:r>
             <a:r>
               <a:rPr lang="en-US"/>
-              <a:t>up."</a:t>
+              <a:t>learning."</a:t>
             </a:r>
             <a:endParaRPr lang="en-US" dirty="0"/>
           </a:p>
@@ -4106,6 +4090,113 @@
           <a:p>
             <a:r>
               <a:rPr lang="en-US" dirty="0"/>
+              <a:t>Resources and next steps
+Say:
+Here are your key resources for continuing with skills. The Claude Code documentation at docs.anthropic.com has the complete skills reference. The skills section of the Claude Code docs covers advanced topics like plugin integration and custom tool access. For hands-on practice, try converting one of your existing CLAUDE.md instruction sets into a modular skill this week. And if you build something useful, consider sharing it with the team or the broader community.
+Do:
+- Share links in chat or on screen (approximately 2 minutes)
+- Recommend starting with one specific skill conversion as homework
+- Mention the community channels for sharing and getting help
+- Transition</a:t>
+            </a:r>
+            <a:r>
+              <a:rPr lang="en-US"/>
+              <a:t>: "Let's </a:t>
+            </a:r>
+            <a:r>
+              <a:rPr lang="en-US" dirty="0"/>
+              <a:t>wrap </a:t>
+            </a:r>
+            <a:r>
+              <a:rPr lang="en-US"/>
+              <a:t>up."</a:t>
+            </a:r>
+            <a:endParaRPr lang="en-US" dirty="0"/>
+          </a:p>
+        </p:txBody>
+      </p:sp>
+      <p:sp>
+        <p:nvSpPr>
+          <p:cNvPr id="4" name="Slide Number Placeholder 3"/>
+          <p:cNvSpPr>
+            <a:spLocks noGrp="1"/>
+          </p:cNvSpPr>
+          <p:nvPr>
+            <p:ph type="sldNum" sz="quarter" idx="10"/>
+          </p:nvPr>
+        </p:nvSpPr>
+        <p:spPr/>
+        <p:txBody>
+          <a:bodyPr/>
+          <a:lstStyle/>
+          <a:p>
+            <a:fld id="{F7021451-1387-4CA6-816F-3879F97B5CBC}" type="slidenum">
+              <a:rPr lang="en-US"/>
+              <a:t>42</a:t>
+            </a:fld>
+            <a:endParaRPr lang="en-US"/>
+          </a:p>
+        </p:txBody>
+      </p:sp>
+    </p:spTree>
+    <p:extLst>
+      <p:ext uri="{BB962C8B-B14F-4D97-AF65-F5344CB8AC3E}">
+        <p14:creationId xmlns:p14="http://schemas.microsoft.com/office/powerpoint/2010/main" val="1024086991"/>
+      </p:ext>
+    </p:extLst>
+  </p:cSld>
+  <p:clrMapOvr>
+    <a:masterClrMapping/>
+  </p:clrMapOvr>
+</p:notes>
+</file>
+
+<file path=ppt/notesSlides/notesSlide43.xml><?xml version="1.0" encoding="utf-8"?>
+<p:notes xmlns:a="http://schemas.openxmlformats.org/drawingml/2006/main" xmlns:r="http://schemas.openxmlformats.org/officeDocument/2006/relationships" xmlns:p="http://schemas.openxmlformats.org/presentationml/2006/main">
+  <p:cSld>
+    <p:spTree>
+      <p:nvGrpSpPr>
+        <p:cNvPr id="1" name=""/>
+        <p:cNvGrpSpPr/>
+        <p:nvPr/>
+      </p:nvGrpSpPr>
+      <p:grpSpPr>
+        <a:xfrm>
+          <a:off x="0" y="0"/>
+          <a:ext cx="0" cy="0"/>
+          <a:chOff x="0" y="0"/>
+          <a:chExt cx="0" cy="0"/>
+        </a:xfrm>
+      </p:grpSpPr>
+      <p:sp>
+        <p:nvSpPr>
+          <p:cNvPr id="2" name="Slide Image Placeholder 1"/>
+          <p:cNvSpPr>
+            <a:spLocks noGrp="1" noRot="1" noChangeAspect="1"/>
+          </p:cNvSpPr>
+          <p:nvPr>
+            <p:ph type="sldImg"/>
+          </p:nvPr>
+        </p:nvSpPr>
+        <p:spPr/>
+      </p:sp>
+      <p:sp>
+        <p:nvSpPr>
+          <p:cNvPr id="3" name="Notes Placeholder 2"/>
+          <p:cNvSpPr>
+            <a:spLocks noGrp="1"/>
+          </p:cNvSpPr>
+          <p:nvPr>
+            <p:ph type="body" idx="1"/>
+          </p:nvPr>
+        </p:nvSpPr>
+        <p:spPr/>
+        <p:txBody>
+          <a:bodyPr/>
+          <a:lstStyle/>
+          <a:p>
+            <a:r>
+              <a:rPr lang="en-US" dirty="0"/>
               <a:t>Closing
 Say:
 Thank you for your time and engagement today. You’ve learned how to build, configure, secure, and troubleshoot Claude Code skills. The most important next step is to create your first production skill this week — take a repetitive task in your workflow and encode it as a skill. If you have questions after this session, reach out through the channels listed on the previous slide. I’d love to hear what skills you build.
@@ -4135,7 +4226,7 @@
           <a:p>
             <a:fld id="{F7021451-1387-4CA6-816F-3879F97B5CBC}" type="slidenum">
               <a:rPr lang="en-US"/>
-              <a:t>42</a:t>
+              <a:t>43</a:t>
             </a:fld>
             <a:endParaRPr lang="en-US"/>
           </a:p>
@@ -6388,7 +6479,7 @@
         <p:spPr>
           <a:xfrm>
             <a:off x="640080" y="1645920"/>
-            <a:ext cx="7772400" cy="1097280"/>
+            <a:ext cx="5486400" cy="1097280"/>
           </a:xfrm>
           <a:prstGeom prst="rect">
             <a:avLst/>
@@ -6427,7 +6518,7 @@
         <p:spPr>
           <a:xfrm>
             <a:off x="640080" y="2926080"/>
-            <a:ext cx="6400800" cy="640080"/>
+            <a:ext cx="5486400" cy="640080"/>
           </a:xfrm>
           <a:prstGeom prst="rect">
             <a:avLst/>
@@ -7242,7 +7333,7 @@
                 <a:ea typeface="Test Tiempos Headline Light" pitchFamily="34" charset="-122"/>
                 <a:cs typeface="Test Tiempos Headline Light" pitchFamily="34" charset="-120"/>
               </a:rPr>
-              <a:t>Create your first skill</a:t>
+              <a:t>Create a skill</a:t>
             </a:r>
             <a:endParaRPr lang="en-US" sz="3000" dirty="0"/>
           </a:p>
@@ -12168,7 +12259,7 @@
         <p:spPr>
           <a:xfrm>
             <a:off x="640080" y="1645920"/>
-            <a:ext cx="7772400" cy="1097280"/>
+            <a:ext cx="5486400" cy="1097280"/>
           </a:xfrm>
           <a:prstGeom prst="rect">
             <a:avLst/>
@@ -12207,7 +12298,7 @@
         <p:spPr>
           <a:xfrm>
             <a:off x="640080" y="2926080"/>
-            <a:ext cx="6400800" cy="640080"/>
+            <a:ext cx="5486400" cy="640080"/>
           </a:xfrm>
           <a:prstGeom prst="rect">
             <a:avLst/>
@@ -15379,7 +15470,7 @@
         <p:spPr>
           <a:xfrm>
             <a:off x="640080" y="1645920"/>
-            <a:ext cx="7772400" cy="1097280"/>
+            <a:ext cx="5486400" cy="1097280"/>
           </a:xfrm>
           <a:prstGeom prst="rect">
             <a:avLst/>
@@ -15418,7 +15509,7 @@
         <p:spPr>
           <a:xfrm>
             <a:off x="640080" y="2926080"/>
-            <a:ext cx="6400800" cy="640080"/>
+            <a:ext cx="5486400" cy="640080"/>
           </a:xfrm>
           <a:prstGeom prst="rect">
             <a:avLst/>
@@ -18874,7 +18965,7 @@
         <p:spPr>
           <a:xfrm>
             <a:off x="640080" y="1645920"/>
-            <a:ext cx="7772400" cy="1097280"/>
+            <a:ext cx="5943600" cy="1097280"/>
           </a:xfrm>
           <a:prstGeom prst="rect">
             <a:avLst/>
@@ -18913,7 +19004,7 @@
         <p:spPr>
           <a:xfrm>
             <a:off x="640080" y="2926080"/>
-            <a:ext cx="6400800" cy="640080"/>
+            <a:ext cx="5486400" cy="640080"/>
           </a:xfrm>
           <a:prstGeom prst="rect">
             <a:avLst/>
@@ -22898,6 +22989,736 @@
 
 <file path=ppt/slides/slide38.xml><?xml version="1.0" encoding="utf-8"?>
 <p:sld xmlns:a="http://schemas.openxmlformats.org/drawingml/2006/main" xmlns:r="http://schemas.openxmlformats.org/officeDocument/2006/relationships" xmlns:p="http://schemas.openxmlformats.org/presentationml/2006/main">
+  <p:cSld name="Slide 12">
+    <p:spTree>
+      <p:nvGrpSpPr>
+        <p:cNvPr id="1" name=""/>
+        <p:cNvGrpSpPr/>
+        <p:nvPr/>
+      </p:nvGrpSpPr>
+      <p:grpSpPr>
+        <a:xfrm>
+          <a:off x="0" y="0"/>
+          <a:ext cx="0" cy="0"/>
+          <a:chOff x="0" y="0"/>
+          <a:chExt cx="0" cy="0"/>
+        </a:xfrm>
+      </p:grpSpPr>
+      <p:sp>
+        <p:nvSpPr>
+          <p:cNvPr id="3" name="Text 0"/>
+          <p:cNvSpPr/>
+          <p:nvPr/>
+        </p:nvSpPr>
+        <p:spPr>
+          <a:xfrm>
+            <a:off x="640079" y="182880"/>
+            <a:ext cx="6377169" cy="548640"/>
+          </a:xfrm>
+          <a:prstGeom prst="rect">
+            <a:avLst/>
+          </a:prstGeom>
+          <a:noFill/>
+          <a:ln/>
+        </p:spPr>
+        <p:txBody>
+          <a:bodyPr wrap="square" lIns="0" tIns="0" rIns="0" bIns="0" rtlCol="0" anchor="ctr"/>
+          <a:lstStyle/>
+          <a:p>
+            <a:pPr marL="0" indent="0">
+              <a:buNone/>
+            </a:pPr>
+            <a:r>
+              <a:rPr lang="en-US" sz="2800" b="1" dirty="0">
+                <a:solidFill>
+                  <a:srgbClr val="141413"/>
+                </a:solidFill>
+                <a:latin typeface="Test Tiempos Headline Light" pitchFamily="34" charset="0"/>
+                <a:ea typeface="Test Tiempos Headline Light" pitchFamily="34" charset="-122"/>
+                <a:cs typeface="Test Tiempos Headline Light" pitchFamily="34" charset="-120"/>
+              </a:rPr>
+              <a:t>Test your troubleshooting skills</a:t>
+            </a:r>
+            <a:endParaRPr lang="en-US" sz="2800" dirty="0"/>
+          </a:p>
+        </p:txBody>
+      </p:sp>
+      <p:sp>
+        <p:nvSpPr>
+          <p:cNvPr id="7" name="Shape 4"/>
+          <p:cNvSpPr/>
+          <p:nvPr/>
+        </p:nvSpPr>
+        <p:spPr>
+          <a:xfrm>
+            <a:off x="642004" y="1630509"/>
+            <a:ext cx="5303520" cy="731520"/>
+          </a:xfrm>
+          <a:prstGeom prst="rect">
+            <a:avLst/>
+          </a:prstGeom>
+          <a:solidFill>
+            <a:srgbClr val="FFFFFF"/>
+          </a:solidFill>
+          <a:ln/>
+          <a:effectLst>
+            <a:outerShdw blurRad="76200" dist="25400" dir="8100000" algn="bl" rotWithShape="0">
+              <a:srgbClr val="000000">
+                <a:alpha val="12000"/>
+              </a:srgbClr>
+            </a:outerShdw>
+          </a:effectLst>
+        </p:spPr>
+        <p:txBody>
+          <a:bodyPr/>
+          <a:lstStyle/>
+          <a:p>
+            <a:endParaRPr lang="en-US"/>
+          </a:p>
+        </p:txBody>
+      </p:sp>
+      <p:sp>
+        <p:nvSpPr>
+          <p:cNvPr id="8" name="Shape 5"/>
+          <p:cNvSpPr/>
+          <p:nvPr/>
+        </p:nvSpPr>
+        <p:spPr>
+          <a:xfrm>
+            <a:off x="642004" y="1630509"/>
+            <a:ext cx="54864" cy="731520"/>
+          </a:xfrm>
+          <a:prstGeom prst="rect">
+            <a:avLst/>
+          </a:prstGeom>
+          <a:solidFill>
+            <a:schemeClr val="accent2"/>
+          </a:solidFill>
+          <a:ln/>
+        </p:spPr>
+        <p:txBody>
+          <a:bodyPr/>
+          <a:lstStyle/>
+          <a:p>
+            <a:endParaRPr lang="en-US">
+              <a:solidFill>
+                <a:schemeClr val="accent2"/>
+              </a:solidFill>
+            </a:endParaRPr>
+          </a:p>
+        </p:txBody>
+      </p:sp>
+      <p:sp>
+        <p:nvSpPr>
+          <p:cNvPr id="9" name="Text 6"/>
+          <p:cNvSpPr/>
+          <p:nvPr/>
+        </p:nvSpPr>
+        <p:spPr>
+          <a:xfrm>
+            <a:off x="870604" y="1630509"/>
+            <a:ext cx="914400" cy="731520"/>
+          </a:xfrm>
+          <a:prstGeom prst="rect">
+            <a:avLst/>
+          </a:prstGeom>
+          <a:noFill/>
+          <a:ln/>
+        </p:spPr>
+        <p:txBody>
+          <a:bodyPr wrap="square" lIns="0" tIns="0" rIns="0" bIns="0" rtlCol="0" anchor="ctr"/>
+          <a:lstStyle/>
+          <a:p>
+            <a:pPr marL="0" indent="0">
+              <a:buNone/>
+            </a:pPr>
+            <a:r>
+              <a:rPr lang="en-US" sz="1300" b="1" dirty="0">
+                <a:solidFill>
+                  <a:schemeClr val="accent2"/>
+                </a:solidFill>
+                <a:latin typeface="Lora" pitchFamily="34" charset="0"/>
+                <a:ea typeface="Lora" pitchFamily="34" charset="-122"/>
+                <a:cs typeface="Lora" pitchFamily="34" charset="-120"/>
+              </a:rPr>
+              <a:t>Task 1:</a:t>
+            </a:r>
+            <a:endParaRPr lang="en-US" sz="1300" dirty="0">
+              <a:solidFill>
+                <a:schemeClr val="accent2"/>
+              </a:solidFill>
+            </a:endParaRPr>
+          </a:p>
+        </p:txBody>
+      </p:sp>
+      <p:sp>
+        <p:nvSpPr>
+          <p:cNvPr id="10" name="Text 7"/>
+          <p:cNvSpPr/>
+          <p:nvPr/>
+        </p:nvSpPr>
+        <p:spPr>
+          <a:xfrm>
+            <a:off x="1594904" y="1721949"/>
+            <a:ext cx="4259179" cy="548640"/>
+          </a:xfrm>
+          <a:prstGeom prst="rect">
+            <a:avLst/>
+          </a:prstGeom>
+          <a:noFill/>
+          <a:ln/>
+        </p:spPr>
+        <p:txBody>
+          <a:bodyPr wrap="square" lIns="0" tIns="0" rIns="0" bIns="0" rtlCol="0" anchor="ctr"/>
+          <a:lstStyle/>
+          <a:p>
+            <a:pPr marL="0" indent="0">
+              <a:buNone/>
+            </a:pPr>
+            <a:r>
+              <a:rPr lang="en-US" sz="1300" dirty="0">
+                <a:solidFill>
+                  <a:srgbClr val="141413"/>
+                </a:solidFill>
+                <a:latin typeface="Lora" pitchFamily="34" charset="0"/>
+                <a:ea typeface="Lora" pitchFamily="34" charset="-122"/>
+                <a:cs typeface="Lora" pitchFamily="34" charset="-120"/>
+              </a:rPr>
+              <a:t>Run the agent-skills CLI validator on your code review skill and resolve any warnings it reports</a:t>
+            </a:r>
+            <a:endParaRPr lang="en-US" sz="1300" dirty="0"/>
+          </a:p>
+        </p:txBody>
+      </p:sp>
+      <p:sp>
+        <p:nvSpPr>
+          <p:cNvPr id="11" name="Shape 8"/>
+          <p:cNvSpPr/>
+          <p:nvPr/>
+        </p:nvSpPr>
+        <p:spPr>
+          <a:xfrm>
+            <a:off x="642004" y="2602059"/>
+            <a:ext cx="5303520" cy="731520"/>
+          </a:xfrm>
+          <a:prstGeom prst="rect">
+            <a:avLst/>
+          </a:prstGeom>
+          <a:solidFill>
+            <a:srgbClr val="FFFFFF"/>
+          </a:solidFill>
+          <a:ln/>
+          <a:effectLst>
+            <a:outerShdw blurRad="76200" dist="25400" dir="8100000" algn="bl" rotWithShape="0">
+              <a:srgbClr val="000000">
+                <a:alpha val="12000"/>
+              </a:srgbClr>
+            </a:outerShdw>
+          </a:effectLst>
+        </p:spPr>
+        <p:txBody>
+          <a:bodyPr/>
+          <a:lstStyle/>
+          <a:p>
+            <a:endParaRPr lang="en-US"/>
+          </a:p>
+        </p:txBody>
+      </p:sp>
+      <p:sp>
+        <p:nvSpPr>
+          <p:cNvPr id="12" name="Shape 9"/>
+          <p:cNvSpPr/>
+          <p:nvPr/>
+        </p:nvSpPr>
+        <p:spPr>
+          <a:xfrm>
+            <a:off x="640079" y="2602059"/>
+            <a:ext cx="54864" cy="731520"/>
+          </a:xfrm>
+          <a:prstGeom prst="rect">
+            <a:avLst/>
+          </a:prstGeom>
+          <a:solidFill>
+            <a:schemeClr val="accent2"/>
+          </a:solidFill>
+          <a:ln/>
+        </p:spPr>
+        <p:txBody>
+          <a:bodyPr/>
+          <a:lstStyle/>
+          <a:p>
+            <a:endParaRPr lang="en-US">
+              <a:solidFill>
+                <a:schemeClr val="accent2"/>
+              </a:solidFill>
+            </a:endParaRPr>
+          </a:p>
+        </p:txBody>
+      </p:sp>
+      <p:sp>
+        <p:nvSpPr>
+          <p:cNvPr id="13" name="Text 10"/>
+          <p:cNvSpPr/>
+          <p:nvPr/>
+        </p:nvSpPr>
+        <p:spPr>
+          <a:xfrm>
+            <a:off x="822959" y="2602059"/>
+            <a:ext cx="914400" cy="731520"/>
+          </a:xfrm>
+          <a:prstGeom prst="rect">
+            <a:avLst/>
+          </a:prstGeom>
+          <a:noFill/>
+          <a:ln/>
+        </p:spPr>
+        <p:txBody>
+          <a:bodyPr wrap="square" lIns="0" tIns="0" rIns="0" bIns="0" rtlCol="0" anchor="ctr"/>
+          <a:lstStyle/>
+          <a:p>
+            <a:pPr marL="0" indent="0">
+              <a:buNone/>
+            </a:pPr>
+            <a:r>
+              <a:rPr lang="en-US" sz="1300" b="1" dirty="0">
+                <a:solidFill>
+                  <a:schemeClr val="accent2"/>
+                </a:solidFill>
+                <a:latin typeface="Lora" pitchFamily="34" charset="0"/>
+                <a:ea typeface="Lora" pitchFamily="34" charset="-122"/>
+                <a:cs typeface="Lora" pitchFamily="34" charset="-120"/>
+              </a:rPr>
+              <a:t>Task 2:</a:t>
+            </a:r>
+            <a:endParaRPr lang="en-US" sz="1300" dirty="0">
+              <a:solidFill>
+                <a:schemeClr val="accent2"/>
+              </a:solidFill>
+            </a:endParaRPr>
+          </a:p>
+        </p:txBody>
+      </p:sp>
+      <p:sp>
+        <p:nvSpPr>
+          <p:cNvPr id="14" name="Text 11"/>
+          <p:cNvSpPr/>
+          <p:nvPr/>
+        </p:nvSpPr>
+        <p:spPr>
+          <a:xfrm>
+            <a:off x="1594904" y="2682069"/>
+            <a:ext cx="4259179" cy="548640"/>
+          </a:xfrm>
+          <a:prstGeom prst="rect">
+            <a:avLst/>
+          </a:prstGeom>
+          <a:noFill/>
+          <a:ln/>
+        </p:spPr>
+        <p:txBody>
+          <a:bodyPr wrap="square" lIns="0" tIns="0" rIns="0" bIns="0" rtlCol="0" anchor="ctr"/>
+          <a:lstStyle/>
+          <a:p>
+            <a:pPr marL="0" indent="0">
+              <a:buNone/>
+            </a:pPr>
+            <a:r>
+              <a:rPr lang="en-US" sz="1300" dirty="0">
+                <a:solidFill>
+                  <a:srgbClr val="141413"/>
+                </a:solidFill>
+                <a:latin typeface="Lora" pitchFamily="34" charset="0"/>
+                <a:ea typeface="Lora" pitchFamily="34" charset="-122"/>
+                <a:cs typeface="Lora" pitchFamily="34" charset="-120"/>
+              </a:rPr>
+              <a:t>Walk through the discover, load, behave flow on your skill to verify each stage works correctly</a:t>
+            </a:r>
+            <a:endParaRPr lang="en-US" sz="1300" dirty="0"/>
+          </a:p>
+        </p:txBody>
+      </p:sp>
+      <p:sp>
+        <p:nvSpPr>
+          <p:cNvPr id="15" name="Shape 12"/>
+          <p:cNvSpPr/>
+          <p:nvPr/>
+        </p:nvSpPr>
+        <p:spPr>
+          <a:xfrm>
+            <a:off x="642004" y="3573609"/>
+            <a:ext cx="5303520" cy="731520"/>
+          </a:xfrm>
+          <a:prstGeom prst="rect">
+            <a:avLst/>
+          </a:prstGeom>
+          <a:solidFill>
+            <a:srgbClr val="FFFFFF"/>
+          </a:solidFill>
+          <a:ln/>
+          <a:effectLst>
+            <a:outerShdw blurRad="76200" dist="25400" dir="8100000" algn="bl" rotWithShape="0">
+              <a:srgbClr val="000000">
+                <a:alpha val="12000"/>
+              </a:srgbClr>
+            </a:outerShdw>
+          </a:effectLst>
+        </p:spPr>
+        <p:txBody>
+          <a:bodyPr/>
+          <a:lstStyle/>
+          <a:p>
+            <a:endParaRPr lang="en-US"/>
+          </a:p>
+        </p:txBody>
+      </p:sp>
+      <p:sp>
+        <p:nvSpPr>
+          <p:cNvPr id="16" name="Shape 13"/>
+          <p:cNvSpPr/>
+          <p:nvPr/>
+        </p:nvSpPr>
+        <p:spPr>
+          <a:xfrm>
+            <a:off x="640079" y="3573609"/>
+            <a:ext cx="54864" cy="731520"/>
+          </a:xfrm>
+          <a:prstGeom prst="rect">
+            <a:avLst/>
+          </a:prstGeom>
+          <a:solidFill>
+            <a:schemeClr val="accent2"/>
+          </a:solidFill>
+          <a:ln/>
+        </p:spPr>
+        <p:txBody>
+          <a:bodyPr/>
+          <a:lstStyle/>
+          <a:p>
+            <a:endParaRPr lang="en-US">
+              <a:solidFill>
+                <a:schemeClr val="accent2"/>
+              </a:solidFill>
+            </a:endParaRPr>
+          </a:p>
+        </p:txBody>
+      </p:sp>
+      <p:sp>
+        <p:nvSpPr>
+          <p:cNvPr id="17" name="Text 14"/>
+          <p:cNvSpPr/>
+          <p:nvPr/>
+        </p:nvSpPr>
+        <p:spPr>
+          <a:xfrm>
+            <a:off x="870604" y="3573609"/>
+            <a:ext cx="914400" cy="731520"/>
+          </a:xfrm>
+          <a:prstGeom prst="rect">
+            <a:avLst/>
+          </a:prstGeom>
+          <a:noFill/>
+          <a:ln/>
+        </p:spPr>
+        <p:txBody>
+          <a:bodyPr wrap="square" lIns="0" tIns="0" rIns="0" bIns="0" rtlCol="0" anchor="ctr"/>
+          <a:lstStyle/>
+          <a:p>
+            <a:pPr marL="0" indent="0">
+              <a:buNone/>
+            </a:pPr>
+            <a:r>
+              <a:rPr lang="en-US" sz="1300" b="1" dirty="0">
+                <a:solidFill>
+                  <a:schemeClr val="accent2"/>
+                </a:solidFill>
+                <a:latin typeface="Lora" pitchFamily="34" charset="0"/>
+                <a:ea typeface="Lora" pitchFamily="34" charset="-122"/>
+                <a:cs typeface="Lora" pitchFamily="34" charset="-120"/>
+              </a:rPr>
+              <a:t>Task 3:</a:t>
+            </a:r>
+            <a:endParaRPr lang="en-US" sz="1300" dirty="0">
+              <a:solidFill>
+                <a:schemeClr val="accent2"/>
+              </a:solidFill>
+            </a:endParaRPr>
+          </a:p>
+        </p:txBody>
+      </p:sp>
+      <p:sp>
+        <p:nvSpPr>
+          <p:cNvPr id="18" name="Text 15"/>
+          <p:cNvSpPr/>
+          <p:nvPr/>
+        </p:nvSpPr>
+        <p:spPr>
+          <a:xfrm>
+            <a:off x="1594904" y="3665049"/>
+            <a:ext cx="4259179" cy="548640"/>
+          </a:xfrm>
+          <a:prstGeom prst="rect">
+            <a:avLst/>
+          </a:prstGeom>
+          <a:noFill/>
+          <a:ln/>
+        </p:spPr>
+        <p:txBody>
+          <a:bodyPr wrap="square" lIns="0" tIns="0" rIns="0" bIns="0" rtlCol="0" anchor="ctr"/>
+          <a:lstStyle/>
+          <a:p>
+            <a:pPr marL="0" indent="0">
+              <a:buNone/>
+            </a:pPr>
+            <a:r>
+              <a:rPr lang="en-US" sz="1300" dirty="0">
+                <a:solidFill>
+                  <a:srgbClr val="141413"/>
+                </a:solidFill>
+                <a:latin typeface="Lora" pitchFamily="34" charset="0"/>
+                <a:ea typeface="Lora" pitchFamily="34" charset="-122"/>
+                <a:cs typeface="Lora" pitchFamily="34" charset="-120"/>
+              </a:rPr>
+              <a:t>Intentionally break one thing in your skill, then swap with a partner and diagnose each other’s issue</a:t>
+            </a:r>
+            <a:endParaRPr lang="en-US" sz="1300" dirty="0"/>
+          </a:p>
+        </p:txBody>
+      </p:sp>
+      <p:sp>
+        <p:nvSpPr>
+          <p:cNvPr id="19" name="Shape 16"/>
+          <p:cNvSpPr/>
+          <p:nvPr/>
+        </p:nvSpPr>
+        <p:spPr>
+          <a:xfrm>
+            <a:off x="6219844" y="1630509"/>
+            <a:ext cx="2286000" cy="2697480"/>
+          </a:xfrm>
+          <a:prstGeom prst="rect">
+            <a:avLst/>
+          </a:prstGeom>
+          <a:solidFill>
+            <a:schemeClr val="accent2">
+              <a:lumMod val="20000"/>
+              <a:lumOff val="80000"/>
+            </a:schemeClr>
+          </a:solidFill>
+          <a:ln/>
+        </p:spPr>
+        <p:txBody>
+          <a:bodyPr/>
+          <a:lstStyle/>
+          <a:p>
+            <a:endParaRPr lang="en-US"/>
+          </a:p>
+        </p:txBody>
+      </p:sp>
+      <p:sp>
+        <p:nvSpPr>
+          <p:cNvPr id="20" name="Text 17"/>
+          <p:cNvSpPr/>
+          <p:nvPr/>
+        </p:nvSpPr>
+        <p:spPr>
+          <a:xfrm>
+            <a:off x="6219844" y="1813389"/>
+            <a:ext cx="2286000" cy="274320"/>
+          </a:xfrm>
+          <a:prstGeom prst="rect">
+            <a:avLst/>
+          </a:prstGeom>
+          <a:noFill/>
+          <a:ln/>
+        </p:spPr>
+        <p:txBody>
+          <a:bodyPr wrap="square" lIns="0" tIns="0" rIns="0" bIns="0" rtlCol="0" anchor="ctr"/>
+          <a:lstStyle/>
+          <a:p>
+            <a:pPr marL="0" indent="0" algn="ctr">
+              <a:buNone/>
+            </a:pPr>
+            <a:r>
+              <a:rPr lang="en-US" sz="1100" b="1" dirty="0">
+                <a:solidFill>
+                  <a:schemeClr val="accent6"/>
+                </a:solidFill>
+                <a:latin typeface="Lora" pitchFamily="34" charset="0"/>
+                <a:ea typeface="Lora" pitchFamily="34" charset="-122"/>
+                <a:cs typeface="Lora" pitchFamily="34" charset="-120"/>
+              </a:rPr>
+              <a:t>Time</a:t>
+            </a:r>
+            <a:endParaRPr lang="en-US" sz="1100" dirty="0">
+              <a:solidFill>
+                <a:schemeClr val="accent6"/>
+              </a:solidFill>
+            </a:endParaRPr>
+          </a:p>
+        </p:txBody>
+      </p:sp>
+      <p:sp>
+        <p:nvSpPr>
+          <p:cNvPr id="21" name="Text 18"/>
+          <p:cNvSpPr/>
+          <p:nvPr/>
+        </p:nvSpPr>
+        <p:spPr>
+          <a:xfrm>
+            <a:off x="6219844" y="2087709"/>
+            <a:ext cx="2286000" cy="365760"/>
+          </a:xfrm>
+          <a:prstGeom prst="rect">
+            <a:avLst/>
+          </a:prstGeom>
+          <a:noFill/>
+          <a:ln/>
+        </p:spPr>
+        <p:txBody>
+          <a:bodyPr wrap="square" lIns="0" tIns="0" rIns="0" bIns="0" rtlCol="0" anchor="ctr"/>
+          <a:lstStyle/>
+          <a:p>
+            <a:pPr marL="0" indent="0" algn="ctr">
+              <a:buNone/>
+            </a:pPr>
+            <a:r>
+              <a:rPr lang="en-US" sz="2200" b="1" dirty="0">
+                <a:solidFill>
+                  <a:schemeClr val="accent2"/>
+                </a:solidFill>
+                <a:latin typeface="Lora" pitchFamily="34" charset="0"/>
+                <a:ea typeface="Lora" pitchFamily="34" charset="-122"/>
+                <a:cs typeface="Lora" pitchFamily="34" charset="-120"/>
+              </a:rPr>
+              <a:t>10 min</a:t>
+            </a:r>
+            <a:endParaRPr lang="en-US" sz="2200" dirty="0">
+              <a:solidFill>
+                <a:schemeClr val="accent2"/>
+              </a:solidFill>
+            </a:endParaRPr>
+          </a:p>
+        </p:txBody>
+      </p:sp>
+      <p:sp>
+        <p:nvSpPr>
+          <p:cNvPr id="22" name="Shape 19"/>
+          <p:cNvSpPr/>
+          <p:nvPr/>
+        </p:nvSpPr>
+        <p:spPr>
+          <a:xfrm>
+            <a:off x="6494164" y="2636349"/>
+            <a:ext cx="1737360" cy="0"/>
+          </a:xfrm>
+          <a:prstGeom prst="line">
+            <a:avLst/>
+          </a:prstGeom>
+          <a:noFill/>
+          <a:ln w="12700">
+            <a:solidFill>
+              <a:srgbClr val="B0AEA5"/>
+            </a:solidFill>
+            <a:prstDash val="dash"/>
+          </a:ln>
+        </p:spPr>
+        <p:txBody>
+          <a:bodyPr/>
+          <a:lstStyle/>
+          <a:p>
+            <a:endParaRPr lang="en-US"/>
+          </a:p>
+        </p:txBody>
+      </p:sp>
+      <p:sp>
+        <p:nvSpPr>
+          <p:cNvPr id="23" name="Text 20"/>
+          <p:cNvSpPr/>
+          <p:nvPr/>
+        </p:nvSpPr>
+        <p:spPr>
+          <a:xfrm>
+            <a:off x="6219844" y="2819229"/>
+            <a:ext cx="2286000" cy="274320"/>
+          </a:xfrm>
+          <a:prstGeom prst="rect">
+            <a:avLst/>
+          </a:prstGeom>
+          <a:noFill/>
+          <a:ln/>
+        </p:spPr>
+        <p:txBody>
+          <a:bodyPr wrap="square" lIns="0" tIns="0" rIns="0" bIns="0" rtlCol="0" anchor="ctr"/>
+          <a:lstStyle/>
+          <a:p>
+            <a:pPr marL="0" indent="0" algn="ctr">
+              <a:buNone/>
+            </a:pPr>
+            <a:r>
+              <a:rPr lang="en-US" sz="1100" b="1" dirty="0">
+                <a:solidFill>
+                  <a:schemeClr val="accent6"/>
+                </a:solidFill>
+                <a:latin typeface="Lora" pitchFamily="34" charset="0"/>
+                <a:ea typeface="Lora" pitchFamily="34" charset="-122"/>
+                <a:cs typeface="Lora" pitchFamily="34" charset="-120"/>
+              </a:rPr>
+              <a:t>Success Criteria</a:t>
+            </a:r>
+            <a:endParaRPr lang="en-US" sz="1100" dirty="0">
+              <a:solidFill>
+                <a:schemeClr val="accent6"/>
+              </a:solidFill>
+            </a:endParaRPr>
+          </a:p>
+        </p:txBody>
+      </p:sp>
+      <p:sp>
+        <p:nvSpPr>
+          <p:cNvPr id="24" name="Text 21"/>
+          <p:cNvSpPr/>
+          <p:nvPr/>
+        </p:nvSpPr>
+        <p:spPr>
+          <a:xfrm>
+            <a:off x="6402724" y="3139269"/>
+            <a:ext cx="1920240" cy="640080"/>
+          </a:xfrm>
+          <a:prstGeom prst="rect">
+            <a:avLst/>
+          </a:prstGeom>
+          <a:noFill/>
+          <a:ln/>
+        </p:spPr>
+        <p:txBody>
+          <a:bodyPr wrap="square" lIns="0" tIns="0" rIns="0" bIns="0" rtlCol="0" anchor="ctr"/>
+          <a:lstStyle/>
+          <a:p>
+            <a:pPr marL="0" indent="0" algn="ctr">
+              <a:buNone/>
+            </a:pPr>
+            <a:r>
+              <a:rPr lang="en-US" sz="1100" dirty="0">
+                <a:latin typeface="Lora" pitchFamily="34" charset="0"/>
+                <a:ea typeface="Lora" pitchFamily="34" charset="-122"/>
+                <a:cs typeface="Lora" pitchFamily="34" charset="-120"/>
+              </a:rPr>
+              <a:t>Skill passes validation and you can diagnose a partner’s bug using the debugging flow</a:t>
+            </a:r>
+            <a:endParaRPr lang="en-US" sz="1100" dirty="0"/>
+          </a:p>
+        </p:txBody>
+      </p:sp>
+    </p:spTree>
+  </p:cSld>
+  <p:clrMapOvr>
+    <a:masterClrMapping/>
+  </p:clrMapOvr>
+</p:sld>
+</file>
+
+<file path=ppt/slides/slide39.xml><?xml version="1.0" encoding="utf-8"?>
+<p:sld xmlns:a="http://schemas.openxmlformats.org/drawingml/2006/main" xmlns:r="http://schemas.openxmlformats.org/officeDocument/2006/relationships" xmlns:p="http://schemas.openxmlformats.org/presentationml/2006/main">
   <p:cSld name="Slide 7">
     <p:spTree>
       <p:nvGrpSpPr>
@@ -23370,477 +24191,6 @@
               <a:t>Skills follow the open Agent Skills standard — portable across Claude and other AI platforms.</a:t>
             </a:r>
             <a:endParaRPr lang="en-US" sz="1300" dirty="0"/>
-          </a:p>
-        </p:txBody>
-      </p:sp>
-    </p:spTree>
-  </p:cSld>
-  <p:clrMapOvr>
-    <a:masterClrMapping/>
-  </p:clrMapOvr>
-</p:sld>
-</file>
-
-<file path=ppt/slides/slide39.xml><?xml version="1.0" encoding="utf-8"?>
-<p:sld xmlns:a="http://schemas.openxmlformats.org/drawingml/2006/main" xmlns:r="http://schemas.openxmlformats.org/officeDocument/2006/relationships" xmlns:p="http://schemas.openxmlformats.org/presentationml/2006/main">
-  <p:cSld name="Slide 20">
-    <p:bg>
-      <p:bgPr>
-        <a:solidFill>
-          <a:srgbClr val="FAF9F5"/>
-        </a:solidFill>
-        <a:effectLst/>
-      </p:bgPr>
-    </p:bg>
-    <p:spTree>
-      <p:nvGrpSpPr>
-        <p:cNvPr id="1" name=""/>
-        <p:cNvGrpSpPr/>
-        <p:nvPr/>
-      </p:nvGrpSpPr>
-      <p:grpSpPr>
-        <a:xfrm>
-          <a:off x="0" y="0"/>
-          <a:ext cx="0" cy="0"/>
-          <a:chOff x="0" y="0"/>
-          <a:chExt cx="0" cy="0"/>
-        </a:xfrm>
-      </p:grpSpPr>
-      <p:sp>
-        <p:nvSpPr>
-          <p:cNvPr id="2" name="TopAccent"/>
-          <p:cNvSpPr/>
-          <p:nvPr/>
-        </p:nvSpPr>
-        <p:spPr>
-          <a:xfrm>
-            <a:off x="0" y="0"/>
-            <a:ext cx="9144000" cy="54864"/>
-          </a:xfrm>
-          <a:prstGeom prst="rect">
-            <a:avLst/>
-          </a:prstGeom>
-          <a:solidFill>
-            <a:srgbClr val="788C5D"/>
-          </a:solidFill>
-          <a:ln>
-            <a:noFill/>
-          </a:ln>
-        </p:spPr>
-        <p:txBody>
-          <a:bodyPr/>
-          <a:lstStyle/>
-          <a:p>
-            <a:endParaRPr lang="en-US"/>
-          </a:p>
-        </p:txBody>
-      </p:sp>
-      <p:sp>
-        <p:nvSpPr>
-          <p:cNvPr id="3" name="HeaderBand"/>
-          <p:cNvSpPr/>
-          <p:nvPr/>
-        </p:nvSpPr>
-        <p:spPr>
-          <a:xfrm>
-            <a:off x="0" y="54864"/>
-            <a:ext cx="9144000" cy="731520"/>
-          </a:xfrm>
-          <a:prstGeom prst="rect">
-            <a:avLst/>
-          </a:prstGeom>
-          <a:solidFill>
-            <a:srgbClr val="788C5D">
-              <a:alpha val="12000"/>
-            </a:srgbClr>
-          </a:solidFill>
-          <a:ln>
-            <a:noFill/>
-          </a:ln>
-        </p:spPr>
-        <p:txBody>
-          <a:bodyPr wrap="square" lIns="457200" rIns="457200" rtlCol="0" anchor="ctr"/>
-          <a:lstStyle/>
-          <a:p>
-            <a:pPr marL="0" indent="0">
-              <a:buNone/>
-            </a:pPr>
-            <a:r>
-              <a:rPr lang="en-US" sz="1000" dirty="0">
-                <a:solidFill>
-                  <a:srgbClr val="788C5D"/>
-                </a:solidFill>
-                <a:latin typeface="Lora" pitchFamily="34" charset="0"/>
-                <a:ea typeface="Lora" pitchFamily="34" charset="-122"/>
-                <a:cs typeface="Lora" pitchFamily="34" charset="-120"/>
-              </a:rPr>
-              <a:t>REFLECTION</a:t>
-            </a:r>
-            <a:endParaRPr lang="en-US" sz="1000" dirty="0"/>
-          </a:p>
-        </p:txBody>
-      </p:sp>
-      <p:sp>
-        <p:nvSpPr>
-          <p:cNvPr id="4" name="Title"/>
-          <p:cNvSpPr/>
-          <p:nvPr/>
-        </p:nvSpPr>
-        <p:spPr>
-          <a:xfrm>
-            <a:off x="457200" y="914400"/>
-            <a:ext cx="8229600" cy="457200"/>
-          </a:xfrm>
-          <a:prstGeom prst="rect">
-            <a:avLst/>
-          </a:prstGeom>
-          <a:noFill/>
-        </p:spPr>
-        <p:txBody>
-          <a:bodyPr wrap="square" lIns="0" rIns="0" rtlCol="0" anchor="b"/>
-          <a:lstStyle/>
-          <a:p>
-            <a:pPr marL="0" indent="0">
-              <a:buNone/>
-            </a:pPr>
-            <a:r>
-              <a:rPr lang="en-US" sz="2400" b="1" dirty="0">
-                <a:solidFill>
-                  <a:srgbClr val="141413"/>
-                </a:solidFill>
-                <a:latin typeface="Lora" pitchFamily="34" charset="0"/>
-                <a:ea typeface="Lora" pitchFamily="34" charset="-122"/>
-                <a:cs typeface="Lora" pitchFamily="34" charset="-120"/>
-              </a:rPr>
-              <a:t>Reflect and apply</a:t>
-            </a:r>
-            <a:endParaRPr lang="en-US" sz="2400" dirty="0"/>
-          </a:p>
-        </p:txBody>
-      </p:sp>
-      <p:sp>
-        <p:nvSpPr>
-          <p:cNvPr id="5" name="Subtitle"/>
-          <p:cNvSpPr/>
-          <p:nvPr/>
-        </p:nvSpPr>
-        <p:spPr>
-          <a:xfrm>
-            <a:off x="457200" y="1371600"/>
-            <a:ext cx="8229600" cy="274320"/>
-          </a:xfrm>
-          <a:prstGeom prst="rect">
-            <a:avLst/>
-          </a:prstGeom>
-          <a:noFill/>
-        </p:spPr>
-        <p:txBody>
-          <a:bodyPr wrap="square" lIns="0" rIns="0" rtlCol="0" anchor="t"/>
-          <a:lstStyle/>
-          <a:p>
-            <a:pPr marL="0" indent="0">
-              <a:buNone/>
-            </a:pPr>
-            <a:r>
-              <a:rPr lang="en-US" sz="1200" dirty="0">
-                <a:solidFill>
-                  <a:srgbClr val="B0AEA5"/>
-                </a:solidFill>
-                <a:latin typeface="Lora" pitchFamily="34" charset="0"/>
-                <a:ea typeface="Lora" pitchFamily="34" charset="-122"/>
-                <a:cs typeface="Lora" pitchFamily="34" charset="-120"/>
-              </a:rPr>
-              <a:t>Take a moment to consider how you will apply what you've learned</a:t>
-            </a:r>
-            <a:endParaRPr lang="en-US" sz="1200" dirty="0"/>
-          </a:p>
-        </p:txBody>
-      </p:sp>
-      <p:sp>
-        <p:nvSpPr>
-          <p:cNvPr id="6" name="Prompt1Card"/>
-          <p:cNvSpPr/>
-          <p:nvPr/>
-        </p:nvSpPr>
-        <p:spPr>
-          <a:xfrm>
-            <a:off x="457200" y="1828800"/>
-            <a:ext cx="3886200" cy="1371600"/>
-          </a:xfrm>
-          <a:prstGeom prst="roundRect">
-            <a:avLst>
-              <a:gd name="adj" fmla="val 5000"/>
-            </a:avLst>
-          </a:prstGeom>
-          <a:solidFill>
-            <a:srgbClr val="FFFFFF"/>
-          </a:solidFill>
-          <a:ln w="12700">
-            <a:solidFill>
-              <a:srgbClr val="788C5D">
-                <a:alpha val="40000"/>
-              </a:srgbClr>
-            </a:solidFill>
-          </a:ln>
-        </p:spPr>
-        <p:txBody>
-          <a:bodyPr wrap="square" lIns="228600" tIns="182880" rIns="228600" bIns="182880" rtlCol="0" anchor="t"/>
-          <a:lstStyle/>
-          <a:p>
-            <a:pPr marL="0" indent="0">
-              <a:buNone/>
-            </a:pPr>
-            <a:r>
-              <a:rPr lang="en-US" sz="1000" dirty="0">
-                <a:solidFill>
-                  <a:srgbClr val="788C5D"/>
-                </a:solidFill>
-                <a:latin typeface="Lora" pitchFamily="34" charset="0"/>
-                <a:ea typeface="Lora" pitchFamily="34" charset="-122"/>
-                <a:cs typeface="Lora" pitchFamily="34" charset="-120"/>
-              </a:rPr>
-              <a:t>WHAT I LEARNED</a:t>
-            </a:r>
-            <a:endParaRPr lang="en-US" sz="1000" dirty="0"/>
-          </a:p>
-          <a:p>
-            <a:pPr marL="0" indent="0">
-              <a:buNone/>
-            </a:pPr>
-            <a:endParaRPr lang="en-US" sz="600" dirty="0"/>
-          </a:p>
-          <a:p>
-            <a:pPr marL="0" indent="0">
-              <a:buNone/>
-            </a:pPr>
-            <a:r>
-              <a:rPr lang="en-US" sz="1200" i="1" dirty="0">
-                <a:solidFill>
-                  <a:srgbClr val="B0AEA5"/>
-                </a:solidFill>
-                <a:latin typeface="Lora" pitchFamily="34" charset="0"/>
-                <a:ea typeface="Lora" pitchFamily="34" charset="-122"/>
-                <a:cs typeface="Lora" pitchFamily="34" charset="-120"/>
-              </a:rPr>
-              <a:t>What capability of skills surprised you the most?</a:t>
-            </a:r>
-            <a:endParaRPr lang="en-US" sz="1200" dirty="0"/>
-          </a:p>
-        </p:txBody>
-      </p:sp>
-      <p:sp>
-        <p:nvSpPr>
-          <p:cNvPr id="7" name="Prompt2Card"/>
-          <p:cNvSpPr/>
-          <p:nvPr/>
-        </p:nvSpPr>
-        <p:spPr>
-          <a:xfrm>
-            <a:off x="4800600" y="1828800"/>
-            <a:ext cx="3886200" cy="1371600"/>
-          </a:xfrm>
-          <a:prstGeom prst="roundRect">
-            <a:avLst>
-              <a:gd name="adj" fmla="val 5000"/>
-            </a:avLst>
-          </a:prstGeom>
-          <a:solidFill>
-            <a:srgbClr val="FFFFFF"/>
-          </a:solidFill>
-          <a:ln w="12700">
-            <a:solidFill>
-              <a:srgbClr val="788C5D">
-                <a:alpha val="40000"/>
-              </a:srgbClr>
-            </a:solidFill>
-          </a:ln>
-        </p:spPr>
-        <p:txBody>
-          <a:bodyPr wrap="square" lIns="228600" tIns="182880" rIns="228600" bIns="182880" rtlCol="0" anchor="t"/>
-          <a:lstStyle/>
-          <a:p>
-            <a:pPr marL="0" indent="0">
-              <a:buNone/>
-            </a:pPr>
-            <a:r>
-              <a:rPr lang="en-US" sz="1000" dirty="0">
-                <a:solidFill>
-                  <a:srgbClr val="788C5D"/>
-                </a:solidFill>
-                <a:latin typeface="Lora" pitchFamily="34" charset="0"/>
-                <a:ea typeface="Lora" pitchFamily="34" charset="-122"/>
-                <a:cs typeface="Lora" pitchFamily="34" charset="-120"/>
-              </a:rPr>
-              <a:t>HOW I'LL USE IT</a:t>
-            </a:r>
-            <a:endParaRPr lang="en-US" sz="1000" dirty="0"/>
-          </a:p>
-          <a:p>
-            <a:pPr marL="0" indent="0">
-              <a:buNone/>
-            </a:pPr>
-            <a:endParaRPr lang="en-US" sz="600" dirty="0"/>
-          </a:p>
-          <a:p>
-            <a:pPr marL="0" indent="0">
-              <a:buNone/>
-            </a:pPr>
-            <a:r>
-              <a:rPr lang="en-US" sz="1200" i="1" dirty="0">
-                <a:solidFill>
-                  <a:srgbClr val="B0AEA5"/>
-                </a:solidFill>
-                <a:latin typeface="Lora" pitchFamily="34" charset="0"/>
-                <a:ea typeface="Lora" pitchFamily="34" charset="-122"/>
-                <a:cs typeface="Lora" pitchFamily="34" charset="-120"/>
-              </a:rPr>
-              <a:t>Which skill will you build first for your workflow?</a:t>
-            </a:r>
-            <a:endParaRPr lang="en-US" sz="1200" dirty="0"/>
-          </a:p>
-        </p:txBody>
-      </p:sp>
-      <p:sp>
-        <p:nvSpPr>
-          <p:cNvPr id="8" name="Prompt3Card"/>
-          <p:cNvSpPr/>
-          <p:nvPr/>
-        </p:nvSpPr>
-        <p:spPr>
-          <a:xfrm>
-            <a:off x="457200" y="3383280"/>
-            <a:ext cx="3886200" cy="1371600"/>
-          </a:xfrm>
-          <a:prstGeom prst="roundRect">
-            <a:avLst>
-              <a:gd name="adj" fmla="val 5000"/>
-            </a:avLst>
-          </a:prstGeom>
-          <a:solidFill>
-            <a:srgbClr val="FFFFFF"/>
-          </a:solidFill>
-          <a:ln w="12700">
-            <a:solidFill>
-              <a:srgbClr val="788C5D">
-                <a:alpha val="40000"/>
-              </a:srgbClr>
-            </a:solidFill>
-          </a:ln>
-        </p:spPr>
-        <p:txBody>
-          <a:bodyPr wrap="square" lIns="228600" tIns="182880" rIns="228600" bIns="182880" rtlCol="0" anchor="t"/>
-          <a:lstStyle/>
-          <a:p>
-            <a:pPr marL="0" indent="0">
-              <a:buNone/>
-            </a:pPr>
-            <a:r>
-              <a:rPr lang="en-US" sz="1000" dirty="0">
-                <a:solidFill>
-                  <a:srgbClr val="788C5D"/>
-                </a:solidFill>
-                <a:latin typeface="Lora" pitchFamily="34" charset="0"/>
-                <a:ea typeface="Lora" pitchFamily="34" charset="-122"/>
-                <a:cs typeface="Lora" pitchFamily="34" charset="-120"/>
-              </a:rPr>
-              <a:t>WHAT SURPRISED ME</a:t>
-            </a:r>
-            <a:endParaRPr lang="en-US" sz="1000" dirty="0"/>
-          </a:p>
-          <a:p>
-            <a:pPr marL="0" indent="0">
-              <a:buNone/>
-            </a:pPr>
-            <a:endParaRPr lang="en-US" sz="600" dirty="0"/>
-          </a:p>
-          <a:p>
-            <a:pPr marL="0" indent="0">
-              <a:buNone/>
-            </a:pPr>
-            <a:r>
-              <a:rPr lang="en-US" sz="1200" i="1" dirty="0">
-                <a:solidFill>
-                  <a:srgbClr val="B0AEA5"/>
-                </a:solidFill>
-                <a:latin typeface="Lora" pitchFamily="34" charset="0"/>
-                <a:ea typeface="Lora" pitchFamily="34" charset="-122"/>
-                <a:cs typeface="Lora" pitchFamily="34" charset="-120"/>
-              </a:rPr>
-              <a:t>Was there a pattern you expected to be harder or easier?</a:t>
-            </a:r>
-            <a:endParaRPr lang="en-US" sz="1200" dirty="0"/>
-          </a:p>
-        </p:txBody>
-      </p:sp>
-      <p:sp>
-        <p:nvSpPr>
-          <p:cNvPr id="9" name="Prompt4Card"/>
-          <p:cNvSpPr/>
-          <p:nvPr/>
-        </p:nvSpPr>
-        <p:spPr>
-          <a:xfrm>
-            <a:off x="4800600" y="3383280"/>
-            <a:ext cx="3886200" cy="1371600"/>
-          </a:xfrm>
-          <a:prstGeom prst="roundRect">
-            <a:avLst>
-              <a:gd name="adj" fmla="val 5000"/>
-            </a:avLst>
-          </a:prstGeom>
-          <a:solidFill>
-            <a:srgbClr val="FFFFFF"/>
-          </a:solidFill>
-          <a:ln w="12700">
-            <a:solidFill>
-              <a:srgbClr val="788C5D">
-                <a:alpha val="40000"/>
-              </a:srgbClr>
-            </a:solidFill>
-          </a:ln>
-        </p:spPr>
-        <p:txBody>
-          <a:bodyPr wrap="square" lIns="228600" tIns="182880" rIns="228600" bIns="182880" rtlCol="0" anchor="t"/>
-          <a:lstStyle/>
-          <a:p>
-            <a:pPr marL="0" indent="0">
-              <a:buNone/>
-            </a:pPr>
-            <a:r>
-              <a:rPr lang="en-US" sz="1000" dirty="0">
-                <a:solidFill>
-                  <a:srgbClr val="788C5D"/>
-                </a:solidFill>
-                <a:latin typeface="Lora" pitchFamily="34" charset="0"/>
-                <a:ea typeface="Lora" pitchFamily="34" charset="-122"/>
-                <a:cs typeface="Lora" pitchFamily="34" charset="-120"/>
-              </a:rPr>
-              <a:t>QUESTIONS I STILL HAVE</a:t>
-            </a:r>
-            <a:endParaRPr lang="en-US" sz="1000" dirty="0"/>
-          </a:p>
-          <a:p>
-            <a:pPr marL="0" indent="0">
-              <a:buNone/>
-            </a:pPr>
-            <a:endParaRPr lang="en-US" sz="600" dirty="0"/>
-          </a:p>
-          <a:p>
-            <a:pPr marL="0" indent="0">
-              <a:buNone/>
-            </a:pPr>
-            <a:r>
-              <a:rPr lang="en-US" sz="1200" i="1" dirty="0">
-                <a:solidFill>
-                  <a:srgbClr val="B0AEA5"/>
-                </a:solidFill>
-                <a:latin typeface="Lora" pitchFamily="34" charset="0"/>
-                <a:ea typeface="Lora" pitchFamily="34" charset="-122"/>
-                <a:cs typeface="Lora" pitchFamily="34" charset="-120"/>
-              </a:rPr>
-              <a:t>What edge cases or limitations do you want to explore?</a:t>
-            </a:r>
-            <a:endParaRPr lang="en-US" sz="1200" dirty="0"/>
           </a:p>
         </p:txBody>
       </p:sp>
@@ -23917,7 +24267,7 @@
         <p:spPr>
           <a:xfrm>
             <a:off x="640080" y="1645920"/>
-            <a:ext cx="7772400" cy="1097280"/>
+            <a:ext cx="5486400" cy="1097280"/>
           </a:xfrm>
           <a:prstGeom prst="rect">
             <a:avLst/>
@@ -23956,7 +24306,7 @@
         <p:spPr>
           <a:xfrm>
             <a:off x="640080" y="2926080"/>
-            <a:ext cx="6400800" cy="640080"/>
+            <a:ext cx="5486400" cy="640080"/>
           </a:xfrm>
           <a:prstGeom prst="rect">
             <a:avLst/>
@@ -24065,6 +24415,477 @@
 </file>
 
 <file path=ppt/slides/slide40.xml><?xml version="1.0" encoding="utf-8"?>
+<p:sld xmlns:a="http://schemas.openxmlformats.org/drawingml/2006/main" xmlns:r="http://schemas.openxmlformats.org/officeDocument/2006/relationships" xmlns:p="http://schemas.openxmlformats.org/presentationml/2006/main">
+  <p:cSld name="Slide 20">
+    <p:bg>
+      <p:bgPr>
+        <a:solidFill>
+          <a:srgbClr val="FAF9F5"/>
+        </a:solidFill>
+        <a:effectLst/>
+      </p:bgPr>
+    </p:bg>
+    <p:spTree>
+      <p:nvGrpSpPr>
+        <p:cNvPr id="1" name=""/>
+        <p:cNvGrpSpPr/>
+        <p:nvPr/>
+      </p:nvGrpSpPr>
+      <p:grpSpPr>
+        <a:xfrm>
+          <a:off x="0" y="0"/>
+          <a:ext cx="0" cy="0"/>
+          <a:chOff x="0" y="0"/>
+          <a:chExt cx="0" cy="0"/>
+        </a:xfrm>
+      </p:grpSpPr>
+      <p:sp>
+        <p:nvSpPr>
+          <p:cNvPr id="2" name="TopAccent"/>
+          <p:cNvSpPr/>
+          <p:nvPr/>
+        </p:nvSpPr>
+        <p:spPr>
+          <a:xfrm>
+            <a:off x="0" y="0"/>
+            <a:ext cx="9144000" cy="54864"/>
+          </a:xfrm>
+          <a:prstGeom prst="rect">
+            <a:avLst/>
+          </a:prstGeom>
+          <a:solidFill>
+            <a:srgbClr val="788C5D"/>
+          </a:solidFill>
+          <a:ln>
+            <a:noFill/>
+          </a:ln>
+        </p:spPr>
+        <p:txBody>
+          <a:bodyPr/>
+          <a:lstStyle/>
+          <a:p>
+            <a:endParaRPr lang="en-US"/>
+          </a:p>
+        </p:txBody>
+      </p:sp>
+      <p:sp>
+        <p:nvSpPr>
+          <p:cNvPr id="3" name="HeaderBand"/>
+          <p:cNvSpPr/>
+          <p:nvPr/>
+        </p:nvSpPr>
+        <p:spPr>
+          <a:xfrm>
+            <a:off x="0" y="54864"/>
+            <a:ext cx="9144000" cy="731520"/>
+          </a:xfrm>
+          <a:prstGeom prst="rect">
+            <a:avLst/>
+          </a:prstGeom>
+          <a:solidFill>
+            <a:srgbClr val="788C5D">
+              <a:alpha val="12000"/>
+            </a:srgbClr>
+          </a:solidFill>
+          <a:ln>
+            <a:noFill/>
+          </a:ln>
+        </p:spPr>
+        <p:txBody>
+          <a:bodyPr wrap="square" lIns="457200" rIns="457200" rtlCol="0" anchor="ctr"/>
+          <a:lstStyle/>
+          <a:p>
+            <a:pPr marL="0" indent="0">
+              <a:buNone/>
+            </a:pPr>
+            <a:r>
+              <a:rPr lang="en-US" sz="1000" dirty="0">
+                <a:solidFill>
+                  <a:srgbClr val="788C5D"/>
+                </a:solidFill>
+                <a:latin typeface="Lora" pitchFamily="34" charset="0"/>
+                <a:ea typeface="Lora" pitchFamily="34" charset="-122"/>
+                <a:cs typeface="Lora" pitchFamily="34" charset="-120"/>
+              </a:rPr>
+              <a:t>REFLECTION</a:t>
+            </a:r>
+            <a:endParaRPr lang="en-US" sz="1000" dirty="0"/>
+          </a:p>
+        </p:txBody>
+      </p:sp>
+      <p:sp>
+        <p:nvSpPr>
+          <p:cNvPr id="4" name="Title"/>
+          <p:cNvSpPr/>
+          <p:nvPr/>
+        </p:nvSpPr>
+        <p:spPr>
+          <a:xfrm>
+            <a:off x="457200" y="914400"/>
+            <a:ext cx="8229600" cy="457200"/>
+          </a:xfrm>
+          <a:prstGeom prst="rect">
+            <a:avLst/>
+          </a:prstGeom>
+          <a:noFill/>
+        </p:spPr>
+        <p:txBody>
+          <a:bodyPr wrap="square" lIns="0" rIns="0" rtlCol="0" anchor="b"/>
+          <a:lstStyle/>
+          <a:p>
+            <a:pPr marL="0" indent="0">
+              <a:buNone/>
+            </a:pPr>
+            <a:r>
+              <a:rPr lang="en-US" sz="2400" b="1" dirty="0">
+                <a:solidFill>
+                  <a:srgbClr val="141413"/>
+                </a:solidFill>
+                <a:latin typeface="Lora" pitchFamily="34" charset="0"/>
+                <a:ea typeface="Lora" pitchFamily="34" charset="-122"/>
+                <a:cs typeface="Lora" pitchFamily="34" charset="-120"/>
+              </a:rPr>
+              <a:t>Reflect and apply</a:t>
+            </a:r>
+            <a:endParaRPr lang="en-US" sz="2400" dirty="0"/>
+          </a:p>
+        </p:txBody>
+      </p:sp>
+      <p:sp>
+        <p:nvSpPr>
+          <p:cNvPr id="5" name="Subtitle"/>
+          <p:cNvSpPr/>
+          <p:nvPr/>
+        </p:nvSpPr>
+        <p:spPr>
+          <a:xfrm>
+            <a:off x="457200" y="1371600"/>
+            <a:ext cx="8229600" cy="274320"/>
+          </a:xfrm>
+          <a:prstGeom prst="rect">
+            <a:avLst/>
+          </a:prstGeom>
+          <a:noFill/>
+        </p:spPr>
+        <p:txBody>
+          <a:bodyPr wrap="square" lIns="0" rIns="0" rtlCol="0" anchor="t"/>
+          <a:lstStyle/>
+          <a:p>
+            <a:pPr marL="0" indent="0">
+              <a:buNone/>
+            </a:pPr>
+            <a:r>
+              <a:rPr lang="en-US" sz="1200" dirty="0">
+                <a:solidFill>
+                  <a:srgbClr val="B0AEA5"/>
+                </a:solidFill>
+                <a:latin typeface="Lora" pitchFamily="34" charset="0"/>
+                <a:ea typeface="Lora" pitchFamily="34" charset="-122"/>
+                <a:cs typeface="Lora" pitchFamily="34" charset="-120"/>
+              </a:rPr>
+              <a:t>Take a moment to consider how you will apply what you've learned</a:t>
+            </a:r>
+            <a:endParaRPr lang="en-US" sz="1200" dirty="0"/>
+          </a:p>
+        </p:txBody>
+      </p:sp>
+      <p:sp>
+        <p:nvSpPr>
+          <p:cNvPr id="6" name="Prompt1Card"/>
+          <p:cNvSpPr/>
+          <p:nvPr/>
+        </p:nvSpPr>
+        <p:spPr>
+          <a:xfrm>
+            <a:off x="457200" y="1828800"/>
+            <a:ext cx="3886200" cy="1371600"/>
+          </a:xfrm>
+          <a:prstGeom prst="roundRect">
+            <a:avLst>
+              <a:gd name="adj" fmla="val 5000"/>
+            </a:avLst>
+          </a:prstGeom>
+          <a:solidFill>
+            <a:srgbClr val="FFFFFF"/>
+          </a:solidFill>
+          <a:ln w="12700">
+            <a:solidFill>
+              <a:srgbClr val="788C5D">
+                <a:alpha val="40000"/>
+              </a:srgbClr>
+            </a:solidFill>
+          </a:ln>
+        </p:spPr>
+        <p:txBody>
+          <a:bodyPr wrap="square" lIns="228600" tIns="182880" rIns="228600" bIns="182880" rtlCol="0" anchor="t"/>
+          <a:lstStyle/>
+          <a:p>
+            <a:pPr marL="0" indent="0">
+              <a:buNone/>
+            </a:pPr>
+            <a:r>
+              <a:rPr lang="en-US" sz="1000" dirty="0">
+                <a:solidFill>
+                  <a:srgbClr val="788C5D"/>
+                </a:solidFill>
+                <a:latin typeface="Lora" pitchFamily="34" charset="0"/>
+                <a:ea typeface="Lora" pitchFamily="34" charset="-122"/>
+                <a:cs typeface="Lora" pitchFamily="34" charset="-120"/>
+              </a:rPr>
+              <a:t>WHAT I LEARNED</a:t>
+            </a:r>
+            <a:endParaRPr lang="en-US" sz="1000" dirty="0"/>
+          </a:p>
+          <a:p>
+            <a:pPr marL="0" indent="0">
+              <a:buNone/>
+            </a:pPr>
+            <a:endParaRPr lang="en-US" sz="600" dirty="0"/>
+          </a:p>
+          <a:p>
+            <a:pPr marL="0" indent="0">
+              <a:buNone/>
+            </a:pPr>
+            <a:r>
+              <a:rPr lang="en-US" sz="1200" i="1" dirty="0">
+                <a:solidFill>
+                  <a:srgbClr val="B0AEA5"/>
+                </a:solidFill>
+                <a:latin typeface="Lora" pitchFamily="34" charset="0"/>
+                <a:ea typeface="Lora" pitchFamily="34" charset="-122"/>
+                <a:cs typeface="Lora" pitchFamily="34" charset="-120"/>
+              </a:rPr>
+              <a:t>What capability of skills surprised you the most?</a:t>
+            </a:r>
+            <a:endParaRPr lang="en-US" sz="1200" dirty="0"/>
+          </a:p>
+        </p:txBody>
+      </p:sp>
+      <p:sp>
+        <p:nvSpPr>
+          <p:cNvPr id="7" name="Prompt2Card"/>
+          <p:cNvSpPr/>
+          <p:nvPr/>
+        </p:nvSpPr>
+        <p:spPr>
+          <a:xfrm>
+            <a:off x="4800600" y="1828800"/>
+            <a:ext cx="3886200" cy="1371600"/>
+          </a:xfrm>
+          <a:prstGeom prst="roundRect">
+            <a:avLst>
+              <a:gd name="adj" fmla="val 5000"/>
+            </a:avLst>
+          </a:prstGeom>
+          <a:solidFill>
+            <a:srgbClr val="FFFFFF"/>
+          </a:solidFill>
+          <a:ln w="12700">
+            <a:solidFill>
+              <a:srgbClr val="788C5D">
+                <a:alpha val="40000"/>
+              </a:srgbClr>
+            </a:solidFill>
+          </a:ln>
+        </p:spPr>
+        <p:txBody>
+          <a:bodyPr wrap="square" lIns="228600" tIns="182880" rIns="228600" bIns="182880" rtlCol="0" anchor="t"/>
+          <a:lstStyle/>
+          <a:p>
+            <a:pPr marL="0" indent="0">
+              <a:buNone/>
+            </a:pPr>
+            <a:r>
+              <a:rPr lang="en-US" sz="1000" dirty="0">
+                <a:solidFill>
+                  <a:srgbClr val="788C5D"/>
+                </a:solidFill>
+                <a:latin typeface="Lora" pitchFamily="34" charset="0"/>
+                <a:ea typeface="Lora" pitchFamily="34" charset="-122"/>
+                <a:cs typeface="Lora" pitchFamily="34" charset="-120"/>
+              </a:rPr>
+              <a:t>HOW I'LL USE IT</a:t>
+            </a:r>
+            <a:endParaRPr lang="en-US" sz="1000" dirty="0"/>
+          </a:p>
+          <a:p>
+            <a:pPr marL="0" indent="0">
+              <a:buNone/>
+            </a:pPr>
+            <a:endParaRPr lang="en-US" sz="600" dirty="0"/>
+          </a:p>
+          <a:p>
+            <a:pPr marL="0" indent="0">
+              <a:buNone/>
+            </a:pPr>
+            <a:r>
+              <a:rPr lang="en-US" sz="1200" i="1" dirty="0">
+                <a:solidFill>
+                  <a:srgbClr val="B0AEA5"/>
+                </a:solidFill>
+                <a:latin typeface="Lora" pitchFamily="34" charset="0"/>
+                <a:ea typeface="Lora" pitchFamily="34" charset="-122"/>
+                <a:cs typeface="Lora" pitchFamily="34" charset="-120"/>
+              </a:rPr>
+              <a:t>Which skill will you build first for your workflow?</a:t>
+            </a:r>
+            <a:endParaRPr lang="en-US" sz="1200" dirty="0"/>
+          </a:p>
+        </p:txBody>
+      </p:sp>
+      <p:sp>
+        <p:nvSpPr>
+          <p:cNvPr id="8" name="Prompt3Card"/>
+          <p:cNvSpPr/>
+          <p:nvPr/>
+        </p:nvSpPr>
+        <p:spPr>
+          <a:xfrm>
+            <a:off x="457200" y="3383280"/>
+            <a:ext cx="3886200" cy="1371600"/>
+          </a:xfrm>
+          <a:prstGeom prst="roundRect">
+            <a:avLst>
+              <a:gd name="adj" fmla="val 5000"/>
+            </a:avLst>
+          </a:prstGeom>
+          <a:solidFill>
+            <a:srgbClr val="FFFFFF"/>
+          </a:solidFill>
+          <a:ln w="12700">
+            <a:solidFill>
+              <a:srgbClr val="788C5D">
+                <a:alpha val="40000"/>
+              </a:srgbClr>
+            </a:solidFill>
+          </a:ln>
+        </p:spPr>
+        <p:txBody>
+          <a:bodyPr wrap="square" lIns="228600" tIns="182880" rIns="228600" bIns="182880" rtlCol="0" anchor="t"/>
+          <a:lstStyle/>
+          <a:p>
+            <a:pPr marL="0" indent="0">
+              <a:buNone/>
+            </a:pPr>
+            <a:r>
+              <a:rPr lang="en-US" sz="1000" dirty="0">
+                <a:solidFill>
+                  <a:srgbClr val="788C5D"/>
+                </a:solidFill>
+                <a:latin typeface="Lora" pitchFamily="34" charset="0"/>
+                <a:ea typeface="Lora" pitchFamily="34" charset="-122"/>
+                <a:cs typeface="Lora" pitchFamily="34" charset="-120"/>
+              </a:rPr>
+              <a:t>WHAT SURPRISED ME</a:t>
+            </a:r>
+            <a:endParaRPr lang="en-US" sz="1000" dirty="0"/>
+          </a:p>
+          <a:p>
+            <a:pPr marL="0" indent="0">
+              <a:buNone/>
+            </a:pPr>
+            <a:endParaRPr lang="en-US" sz="600" dirty="0"/>
+          </a:p>
+          <a:p>
+            <a:pPr marL="0" indent="0">
+              <a:buNone/>
+            </a:pPr>
+            <a:r>
+              <a:rPr lang="en-US" sz="1200" i="1" dirty="0">
+                <a:solidFill>
+                  <a:srgbClr val="B0AEA5"/>
+                </a:solidFill>
+                <a:latin typeface="Lora" pitchFamily="34" charset="0"/>
+                <a:ea typeface="Lora" pitchFamily="34" charset="-122"/>
+                <a:cs typeface="Lora" pitchFamily="34" charset="-120"/>
+              </a:rPr>
+              <a:t>Was there a pattern you expected to be harder or easier?</a:t>
+            </a:r>
+            <a:endParaRPr lang="en-US" sz="1200" dirty="0"/>
+          </a:p>
+        </p:txBody>
+      </p:sp>
+      <p:sp>
+        <p:nvSpPr>
+          <p:cNvPr id="9" name="Prompt4Card"/>
+          <p:cNvSpPr/>
+          <p:nvPr/>
+        </p:nvSpPr>
+        <p:spPr>
+          <a:xfrm>
+            <a:off x="4800600" y="3383280"/>
+            <a:ext cx="3886200" cy="1371600"/>
+          </a:xfrm>
+          <a:prstGeom prst="roundRect">
+            <a:avLst>
+              <a:gd name="adj" fmla="val 5000"/>
+            </a:avLst>
+          </a:prstGeom>
+          <a:solidFill>
+            <a:srgbClr val="FFFFFF"/>
+          </a:solidFill>
+          <a:ln w="12700">
+            <a:solidFill>
+              <a:srgbClr val="788C5D">
+                <a:alpha val="40000"/>
+              </a:srgbClr>
+            </a:solidFill>
+          </a:ln>
+        </p:spPr>
+        <p:txBody>
+          <a:bodyPr wrap="square" lIns="228600" tIns="182880" rIns="228600" bIns="182880" rtlCol="0" anchor="t"/>
+          <a:lstStyle/>
+          <a:p>
+            <a:pPr marL="0" indent="0">
+              <a:buNone/>
+            </a:pPr>
+            <a:r>
+              <a:rPr lang="en-US" sz="1000" dirty="0">
+                <a:solidFill>
+                  <a:srgbClr val="788C5D"/>
+                </a:solidFill>
+                <a:latin typeface="Lora" pitchFamily="34" charset="0"/>
+                <a:ea typeface="Lora" pitchFamily="34" charset="-122"/>
+                <a:cs typeface="Lora" pitchFamily="34" charset="-120"/>
+              </a:rPr>
+              <a:t>QUESTIONS I STILL HAVE</a:t>
+            </a:r>
+            <a:endParaRPr lang="en-US" sz="1000" dirty="0"/>
+          </a:p>
+          <a:p>
+            <a:pPr marL="0" indent="0">
+              <a:buNone/>
+            </a:pPr>
+            <a:endParaRPr lang="en-US" sz="600" dirty="0"/>
+          </a:p>
+          <a:p>
+            <a:pPr marL="0" indent="0">
+              <a:buNone/>
+            </a:pPr>
+            <a:r>
+              <a:rPr lang="en-US" sz="1200" i="1" dirty="0">
+                <a:solidFill>
+                  <a:srgbClr val="B0AEA5"/>
+                </a:solidFill>
+                <a:latin typeface="Lora" pitchFamily="34" charset="0"/>
+                <a:ea typeface="Lora" pitchFamily="34" charset="-122"/>
+                <a:cs typeface="Lora" pitchFamily="34" charset="-120"/>
+              </a:rPr>
+              <a:t>What edge cases or limitations do you want to explore?</a:t>
+            </a:r>
+            <a:endParaRPr lang="en-US" sz="1200" dirty="0"/>
+          </a:p>
+        </p:txBody>
+      </p:sp>
+    </p:spTree>
+  </p:cSld>
+  <p:clrMapOvr>
+    <a:masterClrMapping/>
+  </p:clrMapOvr>
+</p:sld>
+</file>
+
+<file path=ppt/slides/slide41.xml><?xml version="1.0" encoding="utf-8"?>
 <p:sld xmlns:a="http://schemas.openxmlformats.org/drawingml/2006/main" xmlns:r="http://schemas.openxmlformats.org/officeDocument/2006/relationships" xmlns:p="http://schemas.openxmlformats.org/presentationml/2006/main">
   <p:cSld name="Slide 13">
     <p:spTree>
@@ -24626,7 +25447,7 @@
 </p:sld>
 </file>
 
-<file path=ppt/slides/slide41.xml><?xml version="1.0" encoding="utf-8"?>
+<file path=ppt/slides/slide42.xml><?xml version="1.0" encoding="utf-8"?>
 <p:sld xmlns:a="http://schemas.openxmlformats.org/drawingml/2006/main" xmlns:r="http://schemas.openxmlformats.org/officeDocument/2006/relationships" xmlns:p="http://schemas.openxmlformats.org/presentationml/2006/main">
   <p:cSld name="Slide 14">
     <p:spTree>
@@ -25043,7 +25864,7 @@
 </p:sld>
 </file>
 
-<file path=ppt/slides/slide42.xml><?xml version="1.0" encoding="utf-8"?>
+<file path=ppt/slides/slide43.xml><?xml version="1.0" encoding="utf-8"?>
 <p:sld xmlns:a="http://schemas.openxmlformats.org/drawingml/2006/main" xmlns:r="http://schemas.openxmlformats.org/officeDocument/2006/relationships" xmlns:p="http://schemas.openxmlformats.org/presentationml/2006/main">
   <p:cSld name="Slide 15">
     <p:spTree>

--- a/Deliverables/Training_Skills_Developers.pptx
+++ b/Deliverables/Training_Skills_Developers.pptx
@@ -7187,7 +7187,7 @@
       </p:sp>
       <p:pic>
         <p:nvPicPr>
-          <p:cNvPr id="25" name="Picture 24" descr="A purple and black logo  AI-generated content may be incorrect.">
+          <p:cNvPr id="25" name="Picture 24">
             <a:extLst>
               <a:ext uri="{FF2B5EF4-FFF2-40B4-BE49-F238E27FC236}">
                 <a16:creationId xmlns:a16="http://schemas.microsoft.com/office/drawing/2014/main" id="{FB21F7C6-8317-3594-7C4A-DAF5FDD25D63}"/>
@@ -7201,9 +7201,8 @@
         </p:nvPicPr>
         <p:blipFill>
           <a:blip r:embed="rId3"/>
-          <a:stretch>
-            <a:fillRect/>
-          </a:stretch>
+          <a:srcRect/>
+          <a:stretch/>
         </p:blipFill>
         <p:spPr>
           <a:xfrm>
